--- a/tests/OfficeAgent.Tests/Corpus/v1.0.0/native/outputs/p-insertmedia.pptx
+++ b/tests/OfficeAgent.Tests/Corpus/v1.0.0/native/outputs/p-insertmedia.pptx
@@ -2,10 +2,10 @@
 <file path=ppt/presentation.xml><?xml version="1.0" encoding="utf-8"?>
 <p:presentation xmlns:r="http://schemas.openxmlformats.org/officeDocument/2006/relationships" xmlns:p="http://schemas.openxmlformats.org/presentationml/2006/main">
   <p:sldMasterIdLst>
-    <p:sldMasterId xmlns:r="http://schemas.openxmlformats.org/officeDocument/2006/relationships" id="2147483648" r:id="R7bb036bd3e3647dd"/>
+    <p:sldMasterId xmlns:r="http://schemas.openxmlformats.org/officeDocument/2006/relationships" id="2147483648" r:id="R2279f60410ea4505"/>
   </p:sldMasterIdLst>
   <p:sldIdLst>
-    <p:sldId xmlns:r="http://schemas.openxmlformats.org/officeDocument/2006/relationships" id="256" r:id="R91582d600b0a4a8f"/>
+    <p:sldId xmlns:r="http://schemas.openxmlformats.org/officeDocument/2006/relationships" id="256" r:id="Rc11f0460ae624f35"/>
   </p:sldIdLst>
   <p:sldSz cx="12192000" cy="6858000"/>
   <p:notesSz cx="6858000" cy="9144000"/>
@@ -386,11 +386,11 @@
   </p:cSld>
   <p:clrMap bg1="lt1" tx1="dk1" bg2="lt2" tx2="dk2" accent1="accent1" accent2="accent2" accent3="accent3" accent4="accent4" accent5="accent5" accent6="accent6" hlink="hlink" folHlink="folHlink"/>
   <p:sldLayoutIdLst>
-    <p:sldLayoutId xmlns:r="http://schemas.openxmlformats.org/officeDocument/2006/relationships" id="2147483649" r:id="R0b0b101048cd4906"/>
-    <p:sldLayoutId xmlns:r="http://schemas.openxmlformats.org/officeDocument/2006/relationships" id="2147483650" r:id="R80be6ca0a33f495d"/>
-    <p:sldLayoutId xmlns:r="http://schemas.openxmlformats.org/officeDocument/2006/relationships" id="2147483651" r:id="R0baf6eecba51457e"/>
-    <p:sldLayoutId xmlns:r="http://schemas.openxmlformats.org/officeDocument/2006/relationships" id="2147483652" r:id="R962aeedbe8f746b2"/>
-    <p:sldLayoutId xmlns:r="http://schemas.openxmlformats.org/officeDocument/2006/relationships" id="2147483653" r:id="R02e7bd0940a64465"/>
+    <p:sldLayoutId xmlns:r="http://schemas.openxmlformats.org/officeDocument/2006/relationships" id="2147483649" r:id="R10c320af5ef0406d"/>
+    <p:sldLayoutId xmlns:r="http://schemas.openxmlformats.org/officeDocument/2006/relationships" id="2147483650" r:id="R26386f50776d451d"/>
+    <p:sldLayoutId xmlns:r="http://schemas.openxmlformats.org/officeDocument/2006/relationships" id="2147483651" r:id="R1f70282f3e954ff2"/>
+    <p:sldLayoutId xmlns:r="http://schemas.openxmlformats.org/officeDocument/2006/relationships" id="2147483652" r:id="R56565bf94406425b"/>
+    <p:sldLayoutId xmlns:r="http://schemas.openxmlformats.org/officeDocument/2006/relationships" id="2147483653" r:id="Re44bac75b9c44358"/>
   </p:sldLayoutIdLst>
 </p:sldMaster>
 </file>
@@ -540,16 +540,16 @@
             <a:picLocks noChangeAspect="1"/>
           </p:cNvPicPr>
           <p:nvPr>
-            <a:videoFile xmlns:r="http://schemas.openxmlformats.org/officeDocument/2006/relationships" r:link="Rfe2c18310e404649"/>
+            <a:videoFile xmlns:r="http://schemas.openxmlformats.org/officeDocument/2006/relationships" r:link="R3ee66390288c4512"/>
             <p:extLst>
               <p:ext uri="{DAA4B4D4-6D71-4841-9C94-3DE7FCFB9230}">
-                <p14:media xmlns:r="http://schemas.openxmlformats.org/officeDocument/2006/relationships" xmlns:p14="http://schemas.microsoft.com/office/powerpoint/2010/main" r:embed="R5f32c319b5c249ac"/>
+                <p14:media xmlns:r="http://schemas.openxmlformats.org/officeDocument/2006/relationships" xmlns:p14="http://schemas.microsoft.com/office/powerpoint/2010/main" r:embed="R8eb0e78bb10b4e51"/>
               </p:ext>
             </p:extLst>
           </p:nvPr>
         </p:nvPicPr>
         <p:blipFill>
-          <a:blip xmlns:r="http://schemas.openxmlformats.org/officeDocument/2006/relationships" r:embed="R2b8eaf2f0d2d4644"/>
+          <a:blip xmlns:r="http://schemas.openxmlformats.org/officeDocument/2006/relationships" r:embed="R0caab794668645ba"/>
           <a:stretch>
             <a:fillRect/>
           </a:stretch>

--- a/tests/OfficeAgent.Tests/Corpus/v1.0.0/native/outputs/p-insertmedia.pptx
+++ b/tests/OfficeAgent.Tests/Corpus/v1.0.0/native/outputs/p-insertmedia.pptx
@@ -2,10 +2,10 @@
 <file path=ppt/presentation.xml><?xml version="1.0" encoding="utf-8"?>
 <p:presentation xmlns:r="http://schemas.openxmlformats.org/officeDocument/2006/relationships" xmlns:p="http://schemas.openxmlformats.org/presentationml/2006/main">
   <p:sldMasterIdLst>
-    <p:sldMasterId xmlns:r="http://schemas.openxmlformats.org/officeDocument/2006/relationships" id="2147483648" r:id="R2279f60410ea4505"/>
+    <p:sldMasterId xmlns:r="http://schemas.openxmlformats.org/officeDocument/2006/relationships" id="2147483648" r:id="R3b6a650d1b3f475f"/>
   </p:sldMasterIdLst>
   <p:sldIdLst>
-    <p:sldId xmlns:r="http://schemas.openxmlformats.org/officeDocument/2006/relationships" id="256" r:id="Rc11f0460ae624f35"/>
+    <p:sldId xmlns:r="http://schemas.openxmlformats.org/officeDocument/2006/relationships" id="256" r:id="Rb204228fc8604a92"/>
   </p:sldIdLst>
   <p:sldSz cx="12192000" cy="6858000"/>
   <p:notesSz cx="6858000" cy="9144000"/>
@@ -386,11 +386,11 @@
   </p:cSld>
   <p:clrMap bg1="lt1" tx1="dk1" bg2="lt2" tx2="dk2" accent1="accent1" accent2="accent2" accent3="accent3" accent4="accent4" accent5="accent5" accent6="accent6" hlink="hlink" folHlink="folHlink"/>
   <p:sldLayoutIdLst>
-    <p:sldLayoutId xmlns:r="http://schemas.openxmlformats.org/officeDocument/2006/relationships" id="2147483649" r:id="R10c320af5ef0406d"/>
-    <p:sldLayoutId xmlns:r="http://schemas.openxmlformats.org/officeDocument/2006/relationships" id="2147483650" r:id="R26386f50776d451d"/>
-    <p:sldLayoutId xmlns:r="http://schemas.openxmlformats.org/officeDocument/2006/relationships" id="2147483651" r:id="R1f70282f3e954ff2"/>
-    <p:sldLayoutId xmlns:r="http://schemas.openxmlformats.org/officeDocument/2006/relationships" id="2147483652" r:id="R56565bf94406425b"/>
-    <p:sldLayoutId xmlns:r="http://schemas.openxmlformats.org/officeDocument/2006/relationships" id="2147483653" r:id="Re44bac75b9c44358"/>
+    <p:sldLayoutId xmlns:r="http://schemas.openxmlformats.org/officeDocument/2006/relationships" id="2147483649" r:id="R77aaac7b9e5d4849"/>
+    <p:sldLayoutId xmlns:r="http://schemas.openxmlformats.org/officeDocument/2006/relationships" id="2147483650" r:id="R73f95eb1a3c34f13"/>
+    <p:sldLayoutId xmlns:r="http://schemas.openxmlformats.org/officeDocument/2006/relationships" id="2147483651" r:id="Rcda7f62086014a31"/>
+    <p:sldLayoutId xmlns:r="http://schemas.openxmlformats.org/officeDocument/2006/relationships" id="2147483652" r:id="Rc7f52daeb9324fd0"/>
+    <p:sldLayoutId xmlns:r="http://schemas.openxmlformats.org/officeDocument/2006/relationships" id="2147483653" r:id="R9f3302fa8c1f420f"/>
   </p:sldLayoutIdLst>
 </p:sldMaster>
 </file>
@@ -540,16 +540,16 @@
             <a:picLocks noChangeAspect="1"/>
           </p:cNvPicPr>
           <p:nvPr>
-            <a:videoFile xmlns:r="http://schemas.openxmlformats.org/officeDocument/2006/relationships" r:link="R3ee66390288c4512"/>
+            <a:videoFile xmlns:r="http://schemas.openxmlformats.org/officeDocument/2006/relationships" r:link="R77a1e816fcec4f09"/>
             <p:extLst>
               <p:ext uri="{DAA4B4D4-6D71-4841-9C94-3DE7FCFB9230}">
-                <p14:media xmlns:r="http://schemas.openxmlformats.org/officeDocument/2006/relationships" xmlns:p14="http://schemas.microsoft.com/office/powerpoint/2010/main" r:embed="R8eb0e78bb10b4e51"/>
+                <p14:media xmlns:r="http://schemas.openxmlformats.org/officeDocument/2006/relationships" xmlns:p14="http://schemas.microsoft.com/office/powerpoint/2010/main" r:embed="Re14570a8b4e74570"/>
               </p:ext>
             </p:extLst>
           </p:nvPr>
         </p:nvPicPr>
         <p:blipFill>
-          <a:blip xmlns:r="http://schemas.openxmlformats.org/officeDocument/2006/relationships" r:embed="R0caab794668645ba"/>
+          <a:blip xmlns:r="http://schemas.openxmlformats.org/officeDocument/2006/relationships" r:embed="R084d1b2461294c3e"/>
           <a:stretch>
             <a:fillRect/>
           </a:stretch>

--- a/tests/OfficeAgent.Tests/Corpus/v1.0.0/native/outputs/p-insertmedia.pptx
+++ b/tests/OfficeAgent.Tests/Corpus/v1.0.0/native/outputs/p-insertmedia.pptx
@@ -2,10 +2,10 @@
 <file path=ppt/presentation.xml><?xml version="1.0" encoding="utf-8"?>
 <p:presentation xmlns:r="http://schemas.openxmlformats.org/officeDocument/2006/relationships" xmlns:p="http://schemas.openxmlformats.org/presentationml/2006/main">
   <p:sldMasterIdLst>
-    <p:sldMasterId xmlns:r="http://schemas.openxmlformats.org/officeDocument/2006/relationships" id="2147483648" r:id="R3b6a650d1b3f475f"/>
+    <p:sldMasterId xmlns:r="http://schemas.openxmlformats.org/officeDocument/2006/relationships" id="2147483648" r:id="R3f3e208dfdd243b7"/>
   </p:sldMasterIdLst>
   <p:sldIdLst>
-    <p:sldId xmlns:r="http://schemas.openxmlformats.org/officeDocument/2006/relationships" id="256" r:id="Rb204228fc8604a92"/>
+    <p:sldId xmlns:r="http://schemas.openxmlformats.org/officeDocument/2006/relationships" id="256" r:id="R2f3f81c337194ba7"/>
   </p:sldIdLst>
   <p:sldSz cx="12192000" cy="6858000"/>
   <p:notesSz cx="6858000" cy="9144000"/>
@@ -386,11 +386,11 @@
   </p:cSld>
   <p:clrMap bg1="lt1" tx1="dk1" bg2="lt2" tx2="dk2" accent1="accent1" accent2="accent2" accent3="accent3" accent4="accent4" accent5="accent5" accent6="accent6" hlink="hlink" folHlink="folHlink"/>
   <p:sldLayoutIdLst>
-    <p:sldLayoutId xmlns:r="http://schemas.openxmlformats.org/officeDocument/2006/relationships" id="2147483649" r:id="R77aaac7b9e5d4849"/>
-    <p:sldLayoutId xmlns:r="http://schemas.openxmlformats.org/officeDocument/2006/relationships" id="2147483650" r:id="R73f95eb1a3c34f13"/>
-    <p:sldLayoutId xmlns:r="http://schemas.openxmlformats.org/officeDocument/2006/relationships" id="2147483651" r:id="Rcda7f62086014a31"/>
-    <p:sldLayoutId xmlns:r="http://schemas.openxmlformats.org/officeDocument/2006/relationships" id="2147483652" r:id="Rc7f52daeb9324fd0"/>
-    <p:sldLayoutId xmlns:r="http://schemas.openxmlformats.org/officeDocument/2006/relationships" id="2147483653" r:id="R9f3302fa8c1f420f"/>
+    <p:sldLayoutId xmlns:r="http://schemas.openxmlformats.org/officeDocument/2006/relationships" id="2147483649" r:id="R2304fa94851e4808"/>
+    <p:sldLayoutId xmlns:r="http://schemas.openxmlformats.org/officeDocument/2006/relationships" id="2147483650" r:id="R9f9e06f1e74641ab"/>
+    <p:sldLayoutId xmlns:r="http://schemas.openxmlformats.org/officeDocument/2006/relationships" id="2147483651" r:id="Rbd1d2393db864675"/>
+    <p:sldLayoutId xmlns:r="http://schemas.openxmlformats.org/officeDocument/2006/relationships" id="2147483652" r:id="R194c57d9f1ab4a56"/>
+    <p:sldLayoutId xmlns:r="http://schemas.openxmlformats.org/officeDocument/2006/relationships" id="2147483653" r:id="Rc5870c878a474ed1"/>
   </p:sldLayoutIdLst>
 </p:sldMaster>
 </file>
@@ -540,16 +540,16 @@
             <a:picLocks noChangeAspect="1"/>
           </p:cNvPicPr>
           <p:nvPr>
-            <a:videoFile xmlns:r="http://schemas.openxmlformats.org/officeDocument/2006/relationships" r:link="R77a1e816fcec4f09"/>
+            <a:videoFile xmlns:r="http://schemas.openxmlformats.org/officeDocument/2006/relationships" r:link="R2d289ac48d874d67"/>
             <p:extLst>
               <p:ext uri="{DAA4B4D4-6D71-4841-9C94-3DE7FCFB9230}">
-                <p14:media xmlns:r="http://schemas.openxmlformats.org/officeDocument/2006/relationships" xmlns:p14="http://schemas.microsoft.com/office/powerpoint/2010/main" r:embed="Re14570a8b4e74570"/>
+                <p14:media xmlns:r="http://schemas.openxmlformats.org/officeDocument/2006/relationships" xmlns:p14="http://schemas.microsoft.com/office/powerpoint/2010/main" r:embed="R604832632a9449bc"/>
               </p:ext>
             </p:extLst>
           </p:nvPr>
         </p:nvPicPr>
         <p:blipFill>
-          <a:blip xmlns:r="http://schemas.openxmlformats.org/officeDocument/2006/relationships" r:embed="R084d1b2461294c3e"/>
+          <a:blip xmlns:r="http://schemas.openxmlformats.org/officeDocument/2006/relationships" r:embed="R60a8a28603b741e3"/>
           <a:stretch>
             <a:fillRect/>
           </a:stretch>

--- a/tests/OfficeAgent.Tests/Corpus/v1.0.0/native/outputs/p-insertmedia.pptx
+++ b/tests/OfficeAgent.Tests/Corpus/v1.0.0/native/outputs/p-insertmedia.pptx
@@ -2,10 +2,10 @@
 <file path=ppt/presentation.xml><?xml version="1.0" encoding="utf-8"?>
 <p:presentation xmlns:r="http://schemas.openxmlformats.org/officeDocument/2006/relationships" xmlns:p="http://schemas.openxmlformats.org/presentationml/2006/main">
   <p:sldMasterIdLst>
-    <p:sldMasterId xmlns:r="http://schemas.openxmlformats.org/officeDocument/2006/relationships" id="2147483648" r:id="R3f3e208dfdd243b7"/>
+    <p:sldMasterId xmlns:r="http://schemas.openxmlformats.org/officeDocument/2006/relationships" id="2147483648" r:id="R6503b3c540944f78"/>
   </p:sldMasterIdLst>
   <p:sldIdLst>
-    <p:sldId xmlns:r="http://schemas.openxmlformats.org/officeDocument/2006/relationships" id="256" r:id="R2f3f81c337194ba7"/>
+    <p:sldId xmlns:r="http://schemas.openxmlformats.org/officeDocument/2006/relationships" id="256" r:id="R156ba37fbab44e8a"/>
   </p:sldIdLst>
   <p:sldSz cx="12192000" cy="6858000"/>
   <p:notesSz cx="6858000" cy="9144000"/>
@@ -386,11 +386,11 @@
   </p:cSld>
   <p:clrMap bg1="lt1" tx1="dk1" bg2="lt2" tx2="dk2" accent1="accent1" accent2="accent2" accent3="accent3" accent4="accent4" accent5="accent5" accent6="accent6" hlink="hlink" folHlink="folHlink"/>
   <p:sldLayoutIdLst>
-    <p:sldLayoutId xmlns:r="http://schemas.openxmlformats.org/officeDocument/2006/relationships" id="2147483649" r:id="R2304fa94851e4808"/>
-    <p:sldLayoutId xmlns:r="http://schemas.openxmlformats.org/officeDocument/2006/relationships" id="2147483650" r:id="R9f9e06f1e74641ab"/>
-    <p:sldLayoutId xmlns:r="http://schemas.openxmlformats.org/officeDocument/2006/relationships" id="2147483651" r:id="Rbd1d2393db864675"/>
-    <p:sldLayoutId xmlns:r="http://schemas.openxmlformats.org/officeDocument/2006/relationships" id="2147483652" r:id="R194c57d9f1ab4a56"/>
-    <p:sldLayoutId xmlns:r="http://schemas.openxmlformats.org/officeDocument/2006/relationships" id="2147483653" r:id="Rc5870c878a474ed1"/>
+    <p:sldLayoutId xmlns:r="http://schemas.openxmlformats.org/officeDocument/2006/relationships" id="2147483649" r:id="R48c700942b434853"/>
+    <p:sldLayoutId xmlns:r="http://schemas.openxmlformats.org/officeDocument/2006/relationships" id="2147483650" r:id="R24c66231d3324299"/>
+    <p:sldLayoutId xmlns:r="http://schemas.openxmlformats.org/officeDocument/2006/relationships" id="2147483651" r:id="R16e0e91add024463"/>
+    <p:sldLayoutId xmlns:r="http://schemas.openxmlformats.org/officeDocument/2006/relationships" id="2147483652" r:id="R0bc9f83945d14077"/>
+    <p:sldLayoutId xmlns:r="http://schemas.openxmlformats.org/officeDocument/2006/relationships" id="2147483653" r:id="Ra009e67a5ab244c7"/>
   </p:sldLayoutIdLst>
 </p:sldMaster>
 </file>
@@ -540,16 +540,16 @@
             <a:picLocks noChangeAspect="1"/>
           </p:cNvPicPr>
           <p:nvPr>
-            <a:videoFile xmlns:r="http://schemas.openxmlformats.org/officeDocument/2006/relationships" r:link="R2d289ac48d874d67"/>
+            <a:videoFile xmlns:r="http://schemas.openxmlformats.org/officeDocument/2006/relationships" r:link="Rd86e52385a80435a"/>
             <p:extLst>
               <p:ext uri="{DAA4B4D4-6D71-4841-9C94-3DE7FCFB9230}">
-                <p14:media xmlns:r="http://schemas.openxmlformats.org/officeDocument/2006/relationships" xmlns:p14="http://schemas.microsoft.com/office/powerpoint/2010/main" r:embed="R604832632a9449bc"/>
+                <p14:media xmlns:r="http://schemas.openxmlformats.org/officeDocument/2006/relationships" xmlns:p14="http://schemas.microsoft.com/office/powerpoint/2010/main" r:embed="R6406151c6d4d423a"/>
               </p:ext>
             </p:extLst>
           </p:nvPr>
         </p:nvPicPr>
         <p:blipFill>
-          <a:blip xmlns:r="http://schemas.openxmlformats.org/officeDocument/2006/relationships" r:embed="R60a8a28603b741e3"/>
+          <a:blip xmlns:r="http://schemas.openxmlformats.org/officeDocument/2006/relationships" r:embed="R769c9ecec63b4622"/>
           <a:stretch>
             <a:fillRect/>
           </a:stretch>

--- a/tests/OfficeAgent.Tests/Corpus/v1.0.0/native/outputs/p-insertmedia.pptx
+++ b/tests/OfficeAgent.Tests/Corpus/v1.0.0/native/outputs/p-insertmedia.pptx
@@ -2,10 +2,10 @@
 <file path=ppt/presentation.xml><?xml version="1.0" encoding="utf-8"?>
 <p:presentation xmlns:r="http://schemas.openxmlformats.org/officeDocument/2006/relationships" xmlns:p="http://schemas.openxmlformats.org/presentationml/2006/main">
   <p:sldMasterIdLst>
-    <p:sldMasterId xmlns:r="http://schemas.openxmlformats.org/officeDocument/2006/relationships" id="2147483648" r:id="R6503b3c540944f78"/>
+    <p:sldMasterId xmlns:r="http://schemas.openxmlformats.org/officeDocument/2006/relationships" id="2147483648" r:id="Rc141df2d148844d7"/>
   </p:sldMasterIdLst>
   <p:sldIdLst>
-    <p:sldId xmlns:r="http://schemas.openxmlformats.org/officeDocument/2006/relationships" id="256" r:id="R156ba37fbab44e8a"/>
+    <p:sldId xmlns:r="http://schemas.openxmlformats.org/officeDocument/2006/relationships" id="256" r:id="R43a02ebe592e4f84"/>
   </p:sldIdLst>
   <p:sldSz cx="12192000" cy="6858000"/>
   <p:notesSz cx="6858000" cy="9144000"/>
@@ -13,7 +13,7 @@
 </file>
 
 <file path=ppt/slideLayouts/slideLayout1.xml><?xml version="1.0" encoding="utf-8"?>
-<p:sldLayout xmlns:p="http://schemas.openxmlformats.org/presentationml/2006/main" type="title">
+<p:sldLayout xmlns:a="http://schemas.openxmlformats.org/drawingml/2006/main" xmlns:p="http://schemas.openxmlformats.org/presentationml/2006/main" type="title">
   <p:cSld name="Title Slide">
     <p:spTree>
       <p:nvGrpSpPr>
@@ -91,7 +91,7 @@
 </file>
 
 <file path=ppt/slideLayouts/slideLayout2.xml><?xml version="1.0" encoding="utf-8"?>
-<p:sldLayout xmlns:p="http://schemas.openxmlformats.org/presentationml/2006/main" type="obj">
+<p:sldLayout xmlns:a="http://schemas.openxmlformats.org/drawingml/2006/main" xmlns:p="http://schemas.openxmlformats.org/presentationml/2006/main" type="obj">
   <p:cSld name="Title and Content">
     <p:spTree>
       <p:nvGrpSpPr>
@@ -169,7 +169,7 @@
 </file>
 
 <file path=ppt/slideLayouts/slideLayout3.xml><?xml version="1.0" encoding="utf-8"?>
-<p:sldLayout xmlns:p="http://schemas.openxmlformats.org/presentationml/2006/main" type="secHead">
+<p:sldLayout xmlns:a="http://schemas.openxmlformats.org/drawingml/2006/main" xmlns:p="http://schemas.openxmlformats.org/presentationml/2006/main" type="secHead">
   <p:cSld name="Section Header">
     <p:spTree>
       <p:nvGrpSpPr>
@@ -247,7 +247,7 @@
 </file>
 
 <file path=ppt/slideLayouts/slideLayout4.xml><?xml version="1.0" encoding="utf-8"?>
-<p:sldLayout xmlns:p="http://schemas.openxmlformats.org/presentationml/2006/main" type="titleOnly">
+<p:sldLayout xmlns:a="http://schemas.openxmlformats.org/drawingml/2006/main" xmlns:p="http://schemas.openxmlformats.org/presentationml/2006/main" type="titleOnly">
   <p:cSld name="Title Only">
     <p:spTree>
       <p:nvGrpSpPr>
@@ -295,7 +295,7 @@
 </file>
 
 <file path=ppt/slideLayouts/slideLayout5.xml><?xml version="1.0" encoding="utf-8"?>
-<p:sldLayout xmlns:p="http://schemas.openxmlformats.org/presentationml/2006/main" type="blank">
+<p:sldLayout xmlns:a="http://schemas.openxmlformats.org/drawingml/2006/main" xmlns:p="http://schemas.openxmlformats.org/presentationml/2006/main" type="blank">
   <p:cSld name="Blank">
     <p:spTree>
       <p:nvGrpSpPr>
@@ -313,7 +313,7 @@
 </file>
 
 <file path=ppt/slideMasters/slideMaster1.xml><?xml version="1.0" encoding="utf-8"?>
-<p:sldMaster xmlns:p="http://schemas.openxmlformats.org/presentationml/2006/main">
+<p:sldMaster xmlns:a="http://schemas.openxmlformats.org/drawingml/2006/main" xmlns:r="http://schemas.openxmlformats.org/officeDocument/2006/relationships" xmlns:p="http://schemas.openxmlformats.org/presentationml/2006/main">
   <p:cSld>
     <p:spTree>
       <p:nvGrpSpPr>
@@ -386,11 +386,11 @@
   </p:cSld>
   <p:clrMap bg1="lt1" tx1="dk1" bg2="lt2" tx2="dk2" accent1="accent1" accent2="accent2" accent3="accent3" accent4="accent4" accent5="accent5" accent6="accent6" hlink="hlink" folHlink="folHlink"/>
   <p:sldLayoutIdLst>
-    <p:sldLayoutId xmlns:r="http://schemas.openxmlformats.org/officeDocument/2006/relationships" id="2147483649" r:id="R48c700942b434853"/>
-    <p:sldLayoutId xmlns:r="http://schemas.openxmlformats.org/officeDocument/2006/relationships" id="2147483650" r:id="R24c66231d3324299"/>
-    <p:sldLayoutId xmlns:r="http://schemas.openxmlformats.org/officeDocument/2006/relationships" id="2147483651" r:id="R16e0e91add024463"/>
-    <p:sldLayoutId xmlns:r="http://schemas.openxmlformats.org/officeDocument/2006/relationships" id="2147483652" r:id="R0bc9f83945d14077"/>
-    <p:sldLayoutId xmlns:r="http://schemas.openxmlformats.org/officeDocument/2006/relationships" id="2147483653" r:id="Ra009e67a5ab244c7"/>
+    <p:sldLayoutId xmlns:r="http://schemas.openxmlformats.org/officeDocument/2006/relationships" id="2147483649" r:id="Ref6347a110a04ecc"/>
+    <p:sldLayoutId xmlns:r="http://schemas.openxmlformats.org/officeDocument/2006/relationships" id="2147483650" r:id="Ra02c70ba54384bfb"/>
+    <p:sldLayoutId xmlns:r="http://schemas.openxmlformats.org/officeDocument/2006/relationships" id="2147483651" r:id="Rdc1e167fc438419f"/>
+    <p:sldLayoutId xmlns:r="http://schemas.openxmlformats.org/officeDocument/2006/relationships" id="2147483652" r:id="R4bb15db3ad5849f9"/>
+    <p:sldLayoutId xmlns:r="http://schemas.openxmlformats.org/officeDocument/2006/relationships" id="2147483653" r:id="R3a8fbedc677c44e8"/>
   </p:sldLayoutIdLst>
 </p:sldMaster>
 </file>
@@ -540,16 +540,16 @@
             <a:picLocks noChangeAspect="1"/>
           </p:cNvPicPr>
           <p:nvPr>
-            <a:videoFile xmlns:r="http://schemas.openxmlformats.org/officeDocument/2006/relationships" r:link="Rd86e52385a80435a"/>
+            <a:videoFile xmlns:r="http://schemas.openxmlformats.org/officeDocument/2006/relationships" r:link="Re22f16a099ab4bc9"/>
             <p:extLst>
               <p:ext uri="{DAA4B4D4-6D71-4841-9C94-3DE7FCFB9230}">
-                <p14:media xmlns:r="http://schemas.openxmlformats.org/officeDocument/2006/relationships" xmlns:p14="http://schemas.microsoft.com/office/powerpoint/2010/main" r:embed="R6406151c6d4d423a"/>
+                <p14:media xmlns:r="http://schemas.openxmlformats.org/officeDocument/2006/relationships" xmlns:p14="http://schemas.microsoft.com/office/powerpoint/2010/main" r:embed="R231ae588276043e6"/>
               </p:ext>
             </p:extLst>
           </p:nvPr>
         </p:nvPicPr>
         <p:blipFill>
-          <a:blip xmlns:r="http://schemas.openxmlformats.org/officeDocument/2006/relationships" r:embed="R769c9ecec63b4622"/>
+          <a:blip xmlns:r="http://schemas.openxmlformats.org/officeDocument/2006/relationships" r:embed="R34c22abc52bf4680"/>
           <a:stretch>
             <a:fillRect/>
           </a:stretch>
